--- a/slides/wanlai-elem-sdg12-consumption/wanlai-elem-sdg12-consumption.pptx
+++ b/slides/wanlai-elem-sdg12-consumption/wanlai-elem-sdg12-consumption.pptx
@@ -3534,7 +3534,9 @@
       <p:grpSpPr/>
       <p:pic>
         <p:nvPicPr>
-          <p:cNvPr id="2" name="Picture 1" descr="018.jpg"/>
+          <p:cNvPr id="2" name="Picture 1" descr="018.jpg">
+            <a:hlinkClick r:id="rId3"/>
+          </p:cNvPr>
           <p:cNvPicPr>
             <a:picLocks noChangeAspect="1"/>
           </p:cNvPicPr>

--- a/slides/wanlai-elem-sdg12-consumption/wanlai-elem-sdg12-consumption.pptx
+++ b/slides/wanlai-elem-sdg12-consumption/wanlai-elem-sdg12-consumption.pptx
@@ -30,6 +30,11 @@
     <p:sldId id="278" r:id="rId29"/>
     <p:sldId id="279" r:id="rId30"/>
     <p:sldId id="280" r:id="rId31"/>
+    <p:sldId id="281" r:id="rId32"/>
+    <p:sldId id="282" r:id="rId33"/>
+    <p:sldId id="283" r:id="rId34"/>
+    <p:sldId id="284" r:id="rId35"/>
+    <p:sldId id="285" r:id="rId36"/>
   </p:sldIdLst>
   <p:sldSz cx="12191695" cy="6858000" type="screen4x3"/>
   <p:notesSz cx="6858000" cy="9144000"/>
@@ -3282,7 +3287,7 @@
       <p:grpSpPr/>
       <p:pic>
         <p:nvPicPr>
-          <p:cNvPr id="2" name="Picture 1" descr="012.jpg"/>
+          <p:cNvPr id="2" name="Picture 1" descr="012.png"/>
           <p:cNvPicPr>
             <a:picLocks noChangeAspect="1"/>
           </p:cNvPicPr>
@@ -3324,7 +3329,7 @@
       <p:grpSpPr/>
       <p:pic>
         <p:nvPicPr>
-          <p:cNvPr id="2" name="Picture 1" descr="013.jpg"/>
+          <p:cNvPr id="2" name="Picture 1" descr="013.png"/>
           <p:cNvPicPr>
             <a:picLocks noChangeAspect="1"/>
           </p:cNvPicPr>
@@ -3492,7 +3497,7 @@
       <p:grpSpPr/>
       <p:pic>
         <p:nvPicPr>
-          <p:cNvPr id="2" name="Picture 1" descr="017.png"/>
+          <p:cNvPr id="2" name="Picture 1" descr="017.jpg"/>
           <p:cNvPicPr>
             <a:picLocks noChangeAspect="1"/>
           </p:cNvPicPr>
@@ -3534,9 +3539,7 @@
       <p:grpSpPr/>
       <p:pic>
         <p:nvPicPr>
-          <p:cNvPr id="2" name="Picture 1" descr="018.jpg">
-            <a:hlinkClick r:id="rId3"/>
-          </p:cNvPr>
+          <p:cNvPr id="2" name="Picture 1" descr="018.jpg"/>
           <p:cNvPicPr>
             <a:picLocks noChangeAspect="1"/>
           </p:cNvPicPr>
@@ -3788,7 +3791,9 @@
       <p:grpSpPr/>
       <p:pic>
         <p:nvPicPr>
-          <p:cNvPr id="2" name="Picture 1" descr="023.png"/>
+          <p:cNvPr id="2" name="Picture 1" descr="023.png">
+            <a:hlinkClick r:id="rId3"/>
+          </p:cNvPr>
           <p:cNvPicPr>
             <a:picLocks noChangeAspect="1"/>
           </p:cNvPicPr>
@@ -3860,6 +3865,174 @@
 </p:sld>
 </file>
 
+<file path=ppt/slides/slide26.xml><?xml version="1.0" encoding="utf-8"?>
+<p:sld xmlns:a="http://schemas.openxmlformats.org/drawingml/2006/main" xmlns:p="http://schemas.openxmlformats.org/presentationml/2006/main" xmlns:r="http://schemas.openxmlformats.org/officeDocument/2006/relationships">
+  <p:cSld>
+    <p:spTree>
+      <p:nvGrpSpPr>
+        <p:cNvPr id="1" name=""/>
+        <p:cNvGrpSpPr/>
+        <p:nvPr/>
+      </p:nvGrpSpPr>
+      <p:grpSpPr/>
+      <p:pic>
+        <p:nvPicPr>
+          <p:cNvPr id="2" name="Picture 1" descr="025.png"/>
+          <p:cNvPicPr>
+            <a:picLocks noChangeAspect="1"/>
+          </p:cNvPicPr>
+          <p:nvPr/>
+        </p:nvPicPr>
+        <p:blipFill>
+          <a:blip r:embed="rId2"/>
+          <a:stretch>
+            <a:fillRect/>
+          </a:stretch>
+        </p:blipFill>
+        <p:spPr>
+          <a:xfrm>
+            <a:off x="0" y="0"/>
+            <a:ext cx="12191695" cy="6858000"/>
+          </a:xfrm>
+          <a:prstGeom prst="rect">
+            <a:avLst/>
+          </a:prstGeom>
+        </p:spPr>
+      </p:pic>
+    </p:spTree>
+  </p:cSld>
+  <p:clrMapOvr>
+    <a:masterClrMapping/>
+  </p:clrMapOvr>
+</p:sld>
+</file>
+
+<file path=ppt/slides/slide27.xml><?xml version="1.0" encoding="utf-8"?>
+<p:sld xmlns:a="http://schemas.openxmlformats.org/drawingml/2006/main" xmlns:p="http://schemas.openxmlformats.org/presentationml/2006/main" xmlns:r="http://schemas.openxmlformats.org/officeDocument/2006/relationships">
+  <p:cSld>
+    <p:spTree>
+      <p:nvGrpSpPr>
+        <p:cNvPr id="1" name=""/>
+        <p:cNvGrpSpPr/>
+        <p:nvPr/>
+      </p:nvGrpSpPr>
+      <p:grpSpPr/>
+      <p:pic>
+        <p:nvPicPr>
+          <p:cNvPr id="2" name="Picture 1" descr="026.png"/>
+          <p:cNvPicPr>
+            <a:picLocks noChangeAspect="1"/>
+          </p:cNvPicPr>
+          <p:nvPr/>
+        </p:nvPicPr>
+        <p:blipFill>
+          <a:blip r:embed="rId2"/>
+          <a:stretch>
+            <a:fillRect/>
+          </a:stretch>
+        </p:blipFill>
+        <p:spPr>
+          <a:xfrm>
+            <a:off x="0" y="0"/>
+            <a:ext cx="12191695" cy="6858000"/>
+          </a:xfrm>
+          <a:prstGeom prst="rect">
+            <a:avLst/>
+          </a:prstGeom>
+        </p:spPr>
+      </p:pic>
+    </p:spTree>
+  </p:cSld>
+  <p:clrMapOvr>
+    <a:masterClrMapping/>
+  </p:clrMapOvr>
+</p:sld>
+</file>
+
+<file path=ppt/slides/slide28.xml><?xml version="1.0" encoding="utf-8"?>
+<p:sld xmlns:a="http://schemas.openxmlformats.org/drawingml/2006/main" xmlns:p="http://schemas.openxmlformats.org/presentationml/2006/main" xmlns:r="http://schemas.openxmlformats.org/officeDocument/2006/relationships">
+  <p:cSld>
+    <p:spTree>
+      <p:nvGrpSpPr>
+        <p:cNvPr id="1" name=""/>
+        <p:cNvGrpSpPr/>
+        <p:nvPr/>
+      </p:nvGrpSpPr>
+      <p:grpSpPr/>
+      <p:pic>
+        <p:nvPicPr>
+          <p:cNvPr id="2" name="Picture 1" descr="027.png"/>
+          <p:cNvPicPr>
+            <a:picLocks noChangeAspect="1"/>
+          </p:cNvPicPr>
+          <p:nvPr/>
+        </p:nvPicPr>
+        <p:blipFill>
+          <a:blip r:embed="rId2"/>
+          <a:stretch>
+            <a:fillRect/>
+          </a:stretch>
+        </p:blipFill>
+        <p:spPr>
+          <a:xfrm>
+            <a:off x="0" y="0"/>
+            <a:ext cx="12191695" cy="6858000"/>
+          </a:xfrm>
+          <a:prstGeom prst="rect">
+            <a:avLst/>
+          </a:prstGeom>
+        </p:spPr>
+      </p:pic>
+    </p:spTree>
+  </p:cSld>
+  <p:clrMapOvr>
+    <a:masterClrMapping/>
+  </p:clrMapOvr>
+</p:sld>
+</file>
+
+<file path=ppt/slides/slide29.xml><?xml version="1.0" encoding="utf-8"?>
+<p:sld xmlns:a="http://schemas.openxmlformats.org/drawingml/2006/main" xmlns:p="http://schemas.openxmlformats.org/presentationml/2006/main" xmlns:r="http://schemas.openxmlformats.org/officeDocument/2006/relationships">
+  <p:cSld>
+    <p:spTree>
+      <p:nvGrpSpPr>
+        <p:cNvPr id="1" name=""/>
+        <p:cNvGrpSpPr/>
+        <p:nvPr/>
+      </p:nvGrpSpPr>
+      <p:grpSpPr/>
+      <p:pic>
+        <p:nvPicPr>
+          <p:cNvPr id="2" name="Picture 1" descr="028.png"/>
+          <p:cNvPicPr>
+            <a:picLocks noChangeAspect="1"/>
+          </p:cNvPicPr>
+          <p:nvPr/>
+        </p:nvPicPr>
+        <p:blipFill>
+          <a:blip r:embed="rId2"/>
+          <a:stretch>
+            <a:fillRect/>
+          </a:stretch>
+        </p:blipFill>
+        <p:spPr>
+          <a:xfrm>
+            <a:off x="0" y="0"/>
+            <a:ext cx="12191695" cy="6858000"/>
+          </a:xfrm>
+          <a:prstGeom prst="rect">
+            <a:avLst/>
+          </a:prstGeom>
+        </p:spPr>
+      </p:pic>
+    </p:spTree>
+  </p:cSld>
+  <p:clrMapOvr>
+    <a:masterClrMapping/>
+  </p:clrMapOvr>
+</p:sld>
+</file>
+
 <file path=ppt/slides/slide3.xml><?xml version="1.0" encoding="utf-8"?>
 <p:sld xmlns:a="http://schemas.openxmlformats.org/drawingml/2006/main" xmlns:p="http://schemas.openxmlformats.org/presentationml/2006/main" xmlns:r="http://schemas.openxmlformats.org/officeDocument/2006/relationships">
   <p:cSld>
@@ -3873,6 +4046,48 @@
       <p:pic>
         <p:nvPicPr>
           <p:cNvPr id="2" name="Picture 1" descr="002.png"/>
+          <p:cNvPicPr>
+            <a:picLocks noChangeAspect="1"/>
+          </p:cNvPicPr>
+          <p:nvPr/>
+        </p:nvPicPr>
+        <p:blipFill>
+          <a:blip r:embed="rId2"/>
+          <a:stretch>
+            <a:fillRect/>
+          </a:stretch>
+        </p:blipFill>
+        <p:spPr>
+          <a:xfrm>
+            <a:off x="0" y="0"/>
+            <a:ext cx="12191695" cy="6858000"/>
+          </a:xfrm>
+          <a:prstGeom prst="rect">
+            <a:avLst/>
+          </a:prstGeom>
+        </p:spPr>
+      </p:pic>
+    </p:spTree>
+  </p:cSld>
+  <p:clrMapOvr>
+    <a:masterClrMapping/>
+  </p:clrMapOvr>
+</p:sld>
+</file>
+
+<file path=ppt/slides/slide30.xml><?xml version="1.0" encoding="utf-8"?>
+<p:sld xmlns:a="http://schemas.openxmlformats.org/drawingml/2006/main" xmlns:p="http://schemas.openxmlformats.org/presentationml/2006/main" xmlns:r="http://schemas.openxmlformats.org/officeDocument/2006/relationships">
+  <p:cSld>
+    <p:spTree>
+      <p:nvGrpSpPr>
+        <p:cNvPr id="1" name=""/>
+        <p:cNvGrpSpPr/>
+        <p:nvPr/>
+      </p:nvGrpSpPr>
+      <p:grpSpPr/>
+      <p:pic>
+        <p:nvPicPr>
+          <p:cNvPr id="2" name="Picture 1" descr="029.png"/>
           <p:cNvPicPr>
             <a:picLocks noChangeAspect="1"/>
           </p:cNvPicPr>
@@ -4082,7 +4297,7 @@
       <p:grpSpPr/>
       <p:pic>
         <p:nvPicPr>
-          <p:cNvPr id="2" name="Picture 1" descr="007.jpg"/>
+          <p:cNvPr id="2" name="Picture 1" descr="007.png"/>
           <p:cNvPicPr>
             <a:picLocks noChangeAspect="1"/>
           </p:cNvPicPr>
@@ -4124,7 +4339,7 @@
       <p:grpSpPr/>
       <p:pic>
         <p:nvPicPr>
-          <p:cNvPr id="2" name="Picture 1" descr="008.png"/>
+          <p:cNvPr id="2" name="Picture 1" descr="008.jpg"/>
           <p:cNvPicPr>
             <a:picLocks noChangeAspect="1"/>
           </p:cNvPicPr>
